--- a/Kafka.pptx
+++ b/Kafka.pptx
@@ -121,6 +121,11 @@
       </a:defRPr>
     </a:lvl9pPr>
   </p:defaultTextStyle>
+  <p:extLst>
+    <p:ext uri="{EFAFB233-063F-42B5-8137-9DF3F51BA10A}">
+      <p15:sldGuideLst xmlns:p15="http://schemas.microsoft.com/office/powerpoint/2012/main"/>
+    </p:ext>
+  </p:extLst>
 </p:presentation>
 </file>
 
@@ -206,7 +211,7 @@
           <a:p>
             <a:fld id="{2EF9C829-360C-4EBB-9913-31B20BDD9A0C}" type="datetimeFigureOut">
               <a:rPr lang="en-IN" smtClean="0"/>
-              <a:t>16-10-2023</a:t>
+              <a:t>21-04-2025</a:t>
             </a:fld>
             <a:endParaRPr lang="en-IN" dirty="0"/>
           </a:p>
@@ -623,7 +628,7 @@
           <a:p>
             <a:fld id="{2133CE5E-D606-42C7-8D19-97ABF8996B29}" type="datetimeFigureOut">
               <a:rPr lang="en-IN" smtClean="0"/>
-              <a:t>16-10-2023</a:t>
+              <a:t>21-04-2025</a:t>
             </a:fld>
             <a:endParaRPr lang="en-IN" dirty="0"/>
           </a:p>
@@ -823,7 +828,7 @@
           <a:p>
             <a:fld id="{2133CE5E-D606-42C7-8D19-97ABF8996B29}" type="datetimeFigureOut">
               <a:rPr lang="en-IN" smtClean="0"/>
-              <a:t>16-10-2023</a:t>
+              <a:t>21-04-2025</a:t>
             </a:fld>
             <a:endParaRPr lang="en-IN" dirty="0"/>
           </a:p>
@@ -1033,7 +1038,7 @@
           <a:p>
             <a:fld id="{2133CE5E-D606-42C7-8D19-97ABF8996B29}" type="datetimeFigureOut">
               <a:rPr lang="en-IN" smtClean="0"/>
-              <a:t>16-10-2023</a:t>
+              <a:t>21-04-2025</a:t>
             </a:fld>
             <a:endParaRPr lang="en-IN" dirty="0"/>
           </a:p>
@@ -1233,7 +1238,7 @@
           <a:p>
             <a:fld id="{2133CE5E-D606-42C7-8D19-97ABF8996B29}" type="datetimeFigureOut">
               <a:rPr lang="en-IN" smtClean="0"/>
-              <a:t>16-10-2023</a:t>
+              <a:t>21-04-2025</a:t>
             </a:fld>
             <a:endParaRPr lang="en-IN" dirty="0"/>
           </a:p>
@@ -1509,7 +1514,7 @@
           <a:p>
             <a:fld id="{2133CE5E-D606-42C7-8D19-97ABF8996B29}" type="datetimeFigureOut">
               <a:rPr lang="en-IN" smtClean="0"/>
-              <a:t>16-10-2023</a:t>
+              <a:t>21-04-2025</a:t>
             </a:fld>
             <a:endParaRPr lang="en-IN" dirty="0"/>
           </a:p>
@@ -1777,7 +1782,7 @@
           <a:p>
             <a:fld id="{2133CE5E-D606-42C7-8D19-97ABF8996B29}" type="datetimeFigureOut">
               <a:rPr lang="en-IN" smtClean="0"/>
-              <a:t>16-10-2023</a:t>
+              <a:t>21-04-2025</a:t>
             </a:fld>
             <a:endParaRPr lang="en-IN" dirty="0"/>
           </a:p>
@@ -2192,7 +2197,7 @@
           <a:p>
             <a:fld id="{2133CE5E-D606-42C7-8D19-97ABF8996B29}" type="datetimeFigureOut">
               <a:rPr lang="en-IN" smtClean="0"/>
-              <a:t>16-10-2023</a:t>
+              <a:t>21-04-2025</a:t>
             </a:fld>
             <a:endParaRPr lang="en-IN" dirty="0"/>
           </a:p>
@@ -2334,7 +2339,7 @@
           <a:p>
             <a:fld id="{2133CE5E-D606-42C7-8D19-97ABF8996B29}" type="datetimeFigureOut">
               <a:rPr lang="en-IN" smtClean="0"/>
-              <a:t>16-10-2023</a:t>
+              <a:t>21-04-2025</a:t>
             </a:fld>
             <a:endParaRPr lang="en-IN" dirty="0"/>
           </a:p>
@@ -2447,7 +2452,7 @@
           <a:p>
             <a:fld id="{2133CE5E-D606-42C7-8D19-97ABF8996B29}" type="datetimeFigureOut">
               <a:rPr lang="en-IN" smtClean="0"/>
-              <a:t>16-10-2023</a:t>
+              <a:t>21-04-2025</a:t>
             </a:fld>
             <a:endParaRPr lang="en-IN" dirty="0"/>
           </a:p>
@@ -2760,7 +2765,7 @@
           <a:p>
             <a:fld id="{2133CE5E-D606-42C7-8D19-97ABF8996B29}" type="datetimeFigureOut">
               <a:rPr lang="en-IN" smtClean="0"/>
-              <a:t>16-10-2023</a:t>
+              <a:t>21-04-2025</a:t>
             </a:fld>
             <a:endParaRPr lang="en-IN" dirty="0"/>
           </a:p>
@@ -3049,7 +3054,7 @@
           <a:p>
             <a:fld id="{2133CE5E-D606-42C7-8D19-97ABF8996B29}" type="datetimeFigureOut">
               <a:rPr lang="en-IN" smtClean="0"/>
-              <a:t>16-10-2023</a:t>
+              <a:t>21-04-2025</a:t>
             </a:fld>
             <a:endParaRPr lang="en-IN" dirty="0"/>
           </a:p>
@@ -3292,7 +3297,7 @@
           <a:p>
             <a:fld id="{2133CE5E-D606-42C7-8D19-97ABF8996B29}" type="datetimeFigureOut">
               <a:rPr lang="en-IN" smtClean="0"/>
-              <a:t>16-10-2023</a:t>
+              <a:t>21-04-2025</a:t>
             </a:fld>
             <a:endParaRPr lang="en-IN" dirty="0"/>
           </a:p>
@@ -9226,7 +9231,7 @@
         </p:nvSpPr>
         <p:spPr>
           <a:xfrm>
-            <a:off x="1981200" y="1078992"/>
+            <a:off x="653143" y="1011813"/>
             <a:ext cx="8229600" cy="5255490"/>
           </a:xfrm>
         </p:spPr>
@@ -9301,6 +9306,67 @@
           <a:p>
             <a:pPr lvl="1"/>
             <a:endParaRPr lang="en-US" sz="2000" dirty="0"/>
+          </a:p>
+        </p:txBody>
+      </p:sp>
+      <p:sp>
+        <p:nvSpPr>
+          <p:cNvPr id="6" name="TextBox 5">
+            <a:extLst>
+              <a:ext uri="{FF2B5EF4-FFF2-40B4-BE49-F238E27FC236}">
+                <a16:creationId xmlns:a16="http://schemas.microsoft.com/office/drawing/2014/main" id="{CE92A281-7B86-1698-5BCB-7110E9CCC416}"/>
+              </a:ext>
+            </a:extLst>
+          </p:cNvPr>
+          <p:cNvSpPr txBox="1"/>
+          <p:nvPr/>
+        </p:nvSpPr>
+        <p:spPr>
+          <a:xfrm>
+            <a:off x="8240486" y="1106521"/>
+            <a:ext cx="3298372" cy="5309146"/>
+          </a:xfrm>
+          <a:prstGeom prst="rect">
+            <a:avLst/>
+          </a:prstGeom>
+          <a:noFill/>
+        </p:spPr>
+        <p:txBody>
+          <a:bodyPr wrap="square">
+            <a:spAutoFit/>
+          </a:bodyPr>
+          <a:lstStyle/>
+          <a:p>
+            <a:pPr algn="l" fontAlgn="base">
+              <a:spcBef>
+                <a:spcPts val="1800"/>
+              </a:spcBef>
+              <a:spcAft>
+                <a:spcPts val="1800"/>
+              </a:spcAft>
+              <a:buNone/>
+            </a:pPr>
+            <a:r>
+              <a:rPr lang="en-US" b="1" i="0" dirty="0">
+                <a:effectLst/>
+                <a:latin typeface="Nunito" pitchFamily="2" charset="0"/>
+              </a:rPr>
+              <a:t>How does Kafka handle message ordering across multiple partitions?</a:t>
+            </a:r>
+          </a:p>
+          <a:p>
+            <a:pPr algn="l" rtl="0" fontAlgn="base">
+              <a:spcAft>
+                <a:spcPts val="750"/>
+              </a:spcAft>
+            </a:pPr>
+            <a:r>
+              <a:rPr lang="en-US" b="0" i="0" dirty="0">
+                <a:effectLst/>
+                <a:latin typeface="Nunito" pitchFamily="2" charset="0"/>
+              </a:rPr>
+              <a:t>Kafka only guarantees message ordering within a single partition. Across multiple partitions, there is no guarantee of message ordering. If global ordering is required, it's typically achieved by using a single partition for the topic, but this limits scalability. For use cases requiring ordering and scalability, it's common to use a partition key that ensures related messages go to the same partition.</a:t>
+            </a:r>
           </a:p>
         </p:txBody>
       </p:sp>

--- a/Kafka.pptx
+++ b/Kafka.pptx
@@ -5,7 +5,7 @@
     <p:sldMasterId id="2147483648" r:id="rId1"/>
   </p:sldMasterIdLst>
   <p:notesMasterIdLst>
-    <p:notesMasterId r:id="rId17"/>
+    <p:notesMasterId r:id="rId19"/>
   </p:notesMasterIdLst>
   <p:sldIdLst>
     <p:sldId id="257" r:id="rId2"/>
@@ -13,16 +13,18 @@
     <p:sldId id="260" r:id="rId4"/>
     <p:sldId id="261" r:id="rId5"/>
     <p:sldId id="262" r:id="rId6"/>
-    <p:sldId id="264" r:id="rId7"/>
-    <p:sldId id="265" r:id="rId8"/>
-    <p:sldId id="266" r:id="rId9"/>
-    <p:sldId id="267" r:id="rId10"/>
-    <p:sldId id="268" r:id="rId11"/>
-    <p:sldId id="269" r:id="rId12"/>
-    <p:sldId id="271" r:id="rId13"/>
-    <p:sldId id="272" r:id="rId14"/>
-    <p:sldId id="273" r:id="rId15"/>
-    <p:sldId id="270" r:id="rId16"/>
+    <p:sldId id="274" r:id="rId7"/>
+    <p:sldId id="264" r:id="rId8"/>
+    <p:sldId id="265" r:id="rId9"/>
+    <p:sldId id="266" r:id="rId10"/>
+    <p:sldId id="267" r:id="rId11"/>
+    <p:sldId id="268" r:id="rId12"/>
+    <p:sldId id="269" r:id="rId13"/>
+    <p:sldId id="275" r:id="rId14"/>
+    <p:sldId id="271" r:id="rId15"/>
+    <p:sldId id="272" r:id="rId16"/>
+    <p:sldId id="273" r:id="rId17"/>
+    <p:sldId id="270" r:id="rId18"/>
   </p:sldIdLst>
   <p:sldSz cx="12192000" cy="6858000"/>
   <p:notesSz cx="6858000" cy="9144000"/>
@@ -211,7 +213,7 @@
           <a:p>
             <a:fld id="{2EF9C829-360C-4EBB-9913-31B20BDD9A0C}" type="datetimeFigureOut">
               <a:rPr lang="en-IN" smtClean="0"/>
-              <a:t>21-04-2025</a:t>
+              <a:t>05-05-2025</a:t>
             </a:fld>
             <a:endParaRPr lang="en-IN" dirty="0"/>
           </a:p>
@@ -628,7 +630,7 @@
           <a:p>
             <a:fld id="{2133CE5E-D606-42C7-8D19-97ABF8996B29}" type="datetimeFigureOut">
               <a:rPr lang="en-IN" smtClean="0"/>
-              <a:t>21-04-2025</a:t>
+              <a:t>05-05-2025</a:t>
             </a:fld>
             <a:endParaRPr lang="en-IN" dirty="0"/>
           </a:p>
@@ -828,7 +830,7 @@
           <a:p>
             <a:fld id="{2133CE5E-D606-42C7-8D19-97ABF8996B29}" type="datetimeFigureOut">
               <a:rPr lang="en-IN" smtClean="0"/>
-              <a:t>21-04-2025</a:t>
+              <a:t>05-05-2025</a:t>
             </a:fld>
             <a:endParaRPr lang="en-IN" dirty="0"/>
           </a:p>
@@ -1038,7 +1040,7 @@
           <a:p>
             <a:fld id="{2133CE5E-D606-42C7-8D19-97ABF8996B29}" type="datetimeFigureOut">
               <a:rPr lang="en-IN" smtClean="0"/>
-              <a:t>21-04-2025</a:t>
+              <a:t>05-05-2025</a:t>
             </a:fld>
             <a:endParaRPr lang="en-IN" dirty="0"/>
           </a:p>
@@ -1238,7 +1240,7 @@
           <a:p>
             <a:fld id="{2133CE5E-D606-42C7-8D19-97ABF8996B29}" type="datetimeFigureOut">
               <a:rPr lang="en-IN" smtClean="0"/>
-              <a:t>21-04-2025</a:t>
+              <a:t>05-05-2025</a:t>
             </a:fld>
             <a:endParaRPr lang="en-IN" dirty="0"/>
           </a:p>
@@ -1514,7 +1516,7 @@
           <a:p>
             <a:fld id="{2133CE5E-D606-42C7-8D19-97ABF8996B29}" type="datetimeFigureOut">
               <a:rPr lang="en-IN" smtClean="0"/>
-              <a:t>21-04-2025</a:t>
+              <a:t>05-05-2025</a:t>
             </a:fld>
             <a:endParaRPr lang="en-IN" dirty="0"/>
           </a:p>
@@ -1782,7 +1784,7 @@
           <a:p>
             <a:fld id="{2133CE5E-D606-42C7-8D19-97ABF8996B29}" type="datetimeFigureOut">
               <a:rPr lang="en-IN" smtClean="0"/>
-              <a:t>21-04-2025</a:t>
+              <a:t>05-05-2025</a:t>
             </a:fld>
             <a:endParaRPr lang="en-IN" dirty="0"/>
           </a:p>
@@ -2197,7 +2199,7 @@
           <a:p>
             <a:fld id="{2133CE5E-D606-42C7-8D19-97ABF8996B29}" type="datetimeFigureOut">
               <a:rPr lang="en-IN" smtClean="0"/>
-              <a:t>21-04-2025</a:t>
+              <a:t>05-05-2025</a:t>
             </a:fld>
             <a:endParaRPr lang="en-IN" dirty="0"/>
           </a:p>
@@ -2339,7 +2341,7 @@
           <a:p>
             <a:fld id="{2133CE5E-D606-42C7-8D19-97ABF8996B29}" type="datetimeFigureOut">
               <a:rPr lang="en-IN" smtClean="0"/>
-              <a:t>21-04-2025</a:t>
+              <a:t>05-05-2025</a:t>
             </a:fld>
             <a:endParaRPr lang="en-IN" dirty="0"/>
           </a:p>
@@ -2452,7 +2454,7 @@
           <a:p>
             <a:fld id="{2133CE5E-D606-42C7-8D19-97ABF8996B29}" type="datetimeFigureOut">
               <a:rPr lang="en-IN" smtClean="0"/>
-              <a:t>21-04-2025</a:t>
+              <a:t>05-05-2025</a:t>
             </a:fld>
             <a:endParaRPr lang="en-IN" dirty="0"/>
           </a:p>
@@ -2765,7 +2767,7 @@
           <a:p>
             <a:fld id="{2133CE5E-D606-42C7-8D19-97ABF8996B29}" type="datetimeFigureOut">
               <a:rPr lang="en-IN" smtClean="0"/>
-              <a:t>21-04-2025</a:t>
+              <a:t>05-05-2025</a:t>
             </a:fld>
             <a:endParaRPr lang="en-IN" dirty="0"/>
           </a:p>
@@ -3054,7 +3056,7 @@
           <a:p>
             <a:fld id="{2133CE5E-D606-42C7-8D19-97ABF8996B29}" type="datetimeFigureOut">
               <a:rPr lang="en-IN" smtClean="0"/>
-              <a:t>21-04-2025</a:t>
+              <a:t>05-05-2025</a:t>
             </a:fld>
             <a:endParaRPr lang="en-IN" dirty="0"/>
           </a:p>
@@ -3297,7 +3299,7 @@
           <a:p>
             <a:fld id="{2133CE5E-D606-42C7-8D19-97ABF8996B29}" type="datetimeFigureOut">
               <a:rPr lang="en-IN" smtClean="0"/>
-              <a:t>21-04-2025</a:t>
+              <a:t>05-05-2025</a:t>
             </a:fld>
             <a:endParaRPr lang="en-IN" dirty="0"/>
           </a:p>
@@ -3832,7 +3834,7 @@
         <p:spPr>
           <a:xfrm>
             <a:off x="838200" y="365126"/>
-            <a:ext cx="10515600" cy="365126"/>
+            <a:ext cx="10515600" cy="511026"/>
           </a:xfrm>
         </p:spPr>
         <p:txBody>
@@ -3843,7 +3845,7 @@
           <a:p>
             <a:r>
               <a:rPr lang="en-US" dirty="0"/>
-              <a:t>Partition offsets</a:t>
+              <a:t>Partitions</a:t>
             </a:r>
           </a:p>
         </p:txBody>
@@ -3858,7 +3860,12 @@
             <p:ph type="sldNum" sz="quarter" idx="12"/>
           </p:nvPr>
         </p:nvSpPr>
-        <p:spPr/>
+        <p:spPr>
+          <a:xfrm>
+            <a:off x="10198100" y="6537323"/>
+            <a:ext cx="355600" cy="152400"/>
+          </a:xfrm>
+        </p:spPr>
         <p:txBody>
           <a:bodyPr/>
           <a:lstStyle/>
@@ -3867,6 +3874,292 @@
               <a:rPr lang="en-US" smtClean="0"/>
               <a:pPr/>
               <a:t>10</a:t>
+            </a:fld>
+            <a:endParaRPr lang="en-US" dirty="0"/>
+          </a:p>
+        </p:txBody>
+      </p:sp>
+      <p:sp>
+        <p:nvSpPr>
+          <p:cNvPr id="35" name="Content Placeholder 2"/>
+          <p:cNvSpPr>
+            <a:spLocks noGrp="1"/>
+          </p:cNvSpPr>
+          <p:nvPr>
+            <p:ph idx="1"/>
+          </p:nvPr>
+        </p:nvSpPr>
+        <p:spPr>
+          <a:xfrm>
+            <a:off x="1981200" y="1078992"/>
+            <a:ext cx="8229600" cy="5255490"/>
+          </a:xfrm>
+        </p:spPr>
+        <p:txBody>
+          <a:bodyPr>
+            <a:normAutofit/>
+          </a:bodyPr>
+          <a:lstStyle/>
+          <a:p>
+            <a:r>
+              <a:rPr lang="en-US" sz="2400" dirty="0"/>
+              <a:t>#partitions of a topic is configurable</a:t>
+            </a:r>
+          </a:p>
+          <a:p>
+            <a:r>
+              <a:rPr lang="en-US" sz="2400" dirty="0"/>
+              <a:t>#partitions determines </a:t>
+            </a:r>
+            <a:r>
+              <a:rPr lang="en-US" sz="2400" b="1" dirty="0"/>
+              <a:t>max</a:t>
+            </a:r>
+            <a:r>
+              <a:rPr lang="en-US" sz="2400" dirty="0"/>
+              <a:t> consumer (group) parallelism</a:t>
+            </a:r>
+          </a:p>
+          <a:p>
+            <a:pPr lvl="1"/>
+            <a:r>
+              <a:rPr lang="en-US" sz="2000" dirty="0"/>
+              <a:t>cf. parallelism of Storm’s KafkaSpout via </a:t>
+            </a:r>
+            <a:r>
+              <a:rPr lang="en-US" sz="1400" dirty="0">
+                <a:latin typeface="Consolas"/>
+                <a:cs typeface="Consolas"/>
+              </a:rPr>
+              <a:t>builder.setSpout(,,</a:t>
+            </a:r>
+            <a:r>
+              <a:rPr lang="en-US" sz="1400" i="1" dirty="0">
+                <a:latin typeface="Consolas"/>
+                <a:cs typeface="Consolas"/>
+              </a:rPr>
+              <a:t>N</a:t>
+            </a:r>
+            <a:r>
+              <a:rPr lang="en-US" sz="1400" dirty="0">
+                <a:latin typeface="Consolas"/>
+                <a:cs typeface="Consolas"/>
+              </a:rPr>
+              <a:t>)</a:t>
+            </a:r>
+          </a:p>
+          <a:p>
+            <a:pPr lvl="1"/>
+            <a:endParaRPr lang="en-US" sz="1400" dirty="0">
+              <a:latin typeface="Consolas"/>
+              <a:cs typeface="Consolas"/>
+            </a:endParaRPr>
+          </a:p>
+          <a:p>
+            <a:pPr lvl="1"/>
+            <a:endParaRPr lang="en-US" sz="1400" dirty="0">
+              <a:latin typeface="Consolas"/>
+              <a:cs typeface="Consolas"/>
+            </a:endParaRPr>
+          </a:p>
+          <a:p>
+            <a:pPr lvl="1"/>
+            <a:endParaRPr lang="en-US" sz="1400" dirty="0">
+              <a:latin typeface="Consolas"/>
+              <a:cs typeface="Consolas"/>
+            </a:endParaRPr>
+          </a:p>
+          <a:p>
+            <a:pPr lvl="1"/>
+            <a:endParaRPr lang="en-US" sz="1400" dirty="0">
+              <a:latin typeface="Consolas"/>
+              <a:cs typeface="Consolas"/>
+            </a:endParaRPr>
+          </a:p>
+          <a:p>
+            <a:pPr lvl="1"/>
+            <a:endParaRPr lang="en-US" sz="1400" dirty="0">
+              <a:latin typeface="Consolas"/>
+              <a:cs typeface="Consolas"/>
+            </a:endParaRPr>
+          </a:p>
+          <a:p>
+            <a:pPr lvl="1"/>
+            <a:endParaRPr lang="en-US" sz="1400" dirty="0">
+              <a:latin typeface="Consolas"/>
+              <a:cs typeface="Consolas"/>
+            </a:endParaRPr>
+          </a:p>
+          <a:p>
+            <a:pPr lvl="1"/>
+            <a:endParaRPr lang="en-US" sz="1400" dirty="0">
+              <a:latin typeface="Consolas"/>
+              <a:cs typeface="Consolas"/>
+            </a:endParaRPr>
+          </a:p>
+          <a:p>
+            <a:pPr lvl="1"/>
+            <a:endParaRPr lang="en-US" sz="1400" dirty="0">
+              <a:latin typeface="Consolas"/>
+              <a:cs typeface="Consolas"/>
+            </a:endParaRPr>
+          </a:p>
+          <a:p>
+            <a:pPr lvl="1"/>
+            <a:endParaRPr lang="en-US" sz="1400" dirty="0">
+              <a:latin typeface="Consolas"/>
+              <a:cs typeface="Consolas"/>
+            </a:endParaRPr>
+          </a:p>
+          <a:p>
+            <a:pPr lvl="1"/>
+            <a:endParaRPr lang="en-US" sz="1400" dirty="0">
+              <a:latin typeface="Consolas"/>
+              <a:cs typeface="Consolas"/>
+            </a:endParaRPr>
+          </a:p>
+          <a:p>
+            <a:pPr lvl="1"/>
+            <a:endParaRPr lang="en-US" sz="1400" dirty="0">
+              <a:latin typeface="Consolas"/>
+              <a:cs typeface="Consolas"/>
+            </a:endParaRPr>
+          </a:p>
+          <a:p>
+            <a:pPr lvl="1"/>
+            <a:endParaRPr lang="en-US" sz="1400" dirty="0">
+              <a:latin typeface="Consolas"/>
+              <a:cs typeface="Consolas"/>
+            </a:endParaRPr>
+          </a:p>
+          <a:p>
+            <a:pPr lvl="1"/>
+            <a:r>
+              <a:rPr lang="en-US" sz="1400" dirty="0">
+                <a:latin typeface="Helvetica"/>
+                <a:cs typeface="Helvetica"/>
+              </a:rPr>
+              <a:t>Consumer group A, with 2 consumers, reads from a 4-partition topic</a:t>
+            </a:r>
+          </a:p>
+          <a:p>
+            <a:pPr lvl="1"/>
+            <a:r>
+              <a:rPr lang="en-US" sz="1400" dirty="0">
+                <a:latin typeface="Helvetica"/>
+                <a:cs typeface="Helvetica"/>
+              </a:rPr>
+              <a:t>Consumer group B, with 4 consumers, reads from the same topic</a:t>
+            </a:r>
+            <a:endParaRPr lang="en-US" sz="1800" dirty="0">
+              <a:latin typeface="Helvetica"/>
+              <a:cs typeface="Helvetica"/>
+            </a:endParaRPr>
+          </a:p>
+        </p:txBody>
+      </p:sp>
+      <p:pic>
+        <p:nvPicPr>
+          <p:cNvPr id="3" name="Picture 2"/>
+          <p:cNvPicPr>
+            <a:picLocks noChangeAspect="1"/>
+          </p:cNvPicPr>
+          <p:nvPr/>
+        </p:nvPicPr>
+        <p:blipFill>
+          <a:blip r:embed="rId2"/>
+          <a:stretch>
+            <a:fillRect/>
+          </a:stretch>
+        </p:blipFill>
+        <p:spPr>
+          <a:xfrm>
+            <a:off x="3366593" y="2648401"/>
+            <a:ext cx="4948137" cy="2630655"/>
+          </a:xfrm>
+          <a:prstGeom prst="rect">
+            <a:avLst/>
+          </a:prstGeom>
+        </p:spPr>
+      </p:pic>
+    </p:spTree>
+    <p:extLst>
+      <p:ext uri="{BB962C8B-B14F-4D97-AF65-F5344CB8AC3E}">
+        <p14:creationId xmlns:p14="http://schemas.microsoft.com/office/powerpoint/2010/main" val="83466490"/>
+      </p:ext>
+    </p:extLst>
+  </p:cSld>
+  <p:clrMapOvr>
+    <a:masterClrMapping/>
+  </p:clrMapOvr>
+</p:sld>
+</file>
+
+<file path=ppt/slides/slide11.xml><?xml version="1.0" encoding="utf-8"?>
+<p:sld xmlns:a="http://schemas.openxmlformats.org/drawingml/2006/main" xmlns:r="http://schemas.openxmlformats.org/officeDocument/2006/relationships" xmlns:p="http://schemas.openxmlformats.org/presentationml/2006/main">
+  <p:cSld>
+    <p:spTree>
+      <p:nvGrpSpPr>
+        <p:cNvPr id="1" name=""/>
+        <p:cNvGrpSpPr/>
+        <p:nvPr/>
+      </p:nvGrpSpPr>
+      <p:grpSpPr>
+        <a:xfrm>
+          <a:off x="0" y="0"/>
+          <a:ext cx="0" cy="0"/>
+          <a:chOff x="0" y="0"/>
+          <a:chExt cx="0" cy="0"/>
+        </a:xfrm>
+      </p:grpSpPr>
+      <p:sp>
+        <p:nvSpPr>
+          <p:cNvPr id="2" name="Title 1"/>
+          <p:cNvSpPr>
+            <a:spLocks noGrp="1"/>
+          </p:cNvSpPr>
+          <p:nvPr>
+            <p:ph type="title"/>
+          </p:nvPr>
+        </p:nvSpPr>
+        <p:spPr>
+          <a:xfrm>
+            <a:off x="838200" y="365126"/>
+            <a:ext cx="10515600" cy="365126"/>
+          </a:xfrm>
+        </p:spPr>
+        <p:txBody>
+          <a:bodyPr>
+            <a:normAutofit fontScale="90000"/>
+          </a:bodyPr>
+          <a:lstStyle/>
+          <a:p>
+            <a:r>
+              <a:rPr lang="en-US" dirty="0"/>
+              <a:t>Partition offsets</a:t>
+            </a:r>
+          </a:p>
+        </p:txBody>
+      </p:sp>
+      <p:sp>
+        <p:nvSpPr>
+          <p:cNvPr id="5" name="Slide Number Placeholder 4"/>
+          <p:cNvSpPr>
+            <a:spLocks noGrp="1"/>
+          </p:cNvSpPr>
+          <p:nvPr>
+            <p:ph type="sldNum" sz="quarter" idx="12"/>
+          </p:nvPr>
+        </p:nvSpPr>
+        <p:spPr/>
+        <p:txBody>
+          <a:bodyPr/>
+          <a:lstStyle/>
+          <a:p>
+            <a:fld id="{407C8B75-4858-41E6-BEC3-A0853FA4AC5B}" type="slidenum">
+              <a:rPr lang="en-US" smtClean="0"/>
+              <a:pPr/>
+              <a:t>11</a:t>
             </a:fld>
             <a:endParaRPr lang="en-US" dirty="0"/>
           </a:p>
@@ -4336,165 +4629,6 @@
 </p:sld>
 </file>
 
-<file path=ppt/slides/slide11.xml><?xml version="1.0" encoding="utf-8"?>
-<p:sld xmlns:a="http://schemas.openxmlformats.org/drawingml/2006/main" xmlns:r="http://schemas.openxmlformats.org/officeDocument/2006/relationships" xmlns:p="http://schemas.openxmlformats.org/presentationml/2006/main">
-  <p:cSld>
-    <p:spTree>
-      <p:nvGrpSpPr>
-        <p:cNvPr id="1" name=""/>
-        <p:cNvGrpSpPr/>
-        <p:nvPr/>
-      </p:nvGrpSpPr>
-      <p:grpSpPr>
-        <a:xfrm>
-          <a:off x="0" y="0"/>
-          <a:ext cx="0" cy="0"/>
-          <a:chOff x="0" y="0"/>
-          <a:chExt cx="0" cy="0"/>
-        </a:xfrm>
-      </p:grpSpPr>
-      <p:sp>
-        <p:nvSpPr>
-          <p:cNvPr id="2" name="Title 1"/>
-          <p:cNvSpPr>
-            <a:spLocks noGrp="1"/>
-          </p:cNvSpPr>
-          <p:nvPr>
-            <p:ph type="title"/>
-          </p:nvPr>
-        </p:nvSpPr>
-        <p:spPr/>
-        <p:txBody>
-          <a:bodyPr/>
-          <a:lstStyle/>
-          <a:p>
-            <a:r>
-              <a:rPr lang="en-US" dirty="0"/>
-              <a:t>Replicas of a partition</a:t>
-            </a:r>
-          </a:p>
-        </p:txBody>
-      </p:sp>
-      <p:sp>
-        <p:nvSpPr>
-          <p:cNvPr id="35" name="Content Placeholder 2"/>
-          <p:cNvSpPr>
-            <a:spLocks noGrp="1"/>
-          </p:cNvSpPr>
-          <p:nvPr>
-            <p:ph idx="1"/>
-          </p:nvPr>
-        </p:nvSpPr>
-        <p:spPr/>
-        <p:txBody>
-          <a:bodyPr/>
-          <a:lstStyle/>
-          <a:p>
-            <a:r>
-              <a:rPr lang="en-US" b="1" dirty="0"/>
-              <a:t>Replicas: </a:t>
-            </a:r>
-            <a:r>
-              <a:rPr lang="en-US" dirty="0"/>
-              <a:t>“backups” of a partition</a:t>
-            </a:r>
-          </a:p>
-          <a:p>
-            <a:pPr lvl="1"/>
-            <a:r>
-              <a:rPr lang="en-US" dirty="0">
-                <a:sym typeface="Wingdings"/>
-              </a:rPr>
-              <a:t>They exist solely to prevent data loss.</a:t>
-            </a:r>
-          </a:p>
-          <a:p>
-            <a:pPr lvl="1"/>
-            <a:r>
-              <a:rPr lang="en-US" dirty="0">
-                <a:sym typeface="Wingdings"/>
-              </a:rPr>
-              <a:t>Replicas are never read from, never written to.</a:t>
-            </a:r>
-          </a:p>
-          <a:p>
-            <a:pPr lvl="2"/>
-            <a:r>
-              <a:rPr lang="en-US" dirty="0">
-                <a:sym typeface="Wingdings"/>
-              </a:rPr>
-              <a:t>They do NOT help to increase producer or consumer parallelism!</a:t>
-            </a:r>
-          </a:p>
-          <a:p>
-            <a:pPr lvl="1"/>
-            <a:r>
-              <a:rPr lang="en-US" dirty="0">
-                <a:sym typeface="Wingdings"/>
-              </a:rPr>
-              <a:t>Kafka tolerates </a:t>
-            </a:r>
-            <a:r>
-              <a:rPr lang="en-US" i="1" dirty="0">
-                <a:sym typeface="Wingdings"/>
-              </a:rPr>
-              <a:t>(numReplicas - 1)</a:t>
-            </a:r>
-            <a:r>
-              <a:rPr lang="en-US" dirty="0">
-                <a:sym typeface="Wingdings"/>
-              </a:rPr>
-              <a:t> dead brokers before losing data</a:t>
-            </a:r>
-          </a:p>
-          <a:p>
-            <a:pPr lvl="2"/>
-            <a:r>
-              <a:rPr lang="en-US" dirty="0">
-                <a:sym typeface="Wingdings"/>
-              </a:rPr>
-              <a:t>LinkedIn: numReplicas == 2  1 broker can die</a:t>
-            </a:r>
-          </a:p>
-        </p:txBody>
-      </p:sp>
-      <p:sp>
-        <p:nvSpPr>
-          <p:cNvPr id="5" name="Slide Number Placeholder 4"/>
-          <p:cNvSpPr>
-            <a:spLocks noGrp="1"/>
-          </p:cNvSpPr>
-          <p:nvPr>
-            <p:ph type="sldNum" sz="quarter" idx="12"/>
-          </p:nvPr>
-        </p:nvSpPr>
-        <p:spPr/>
-        <p:txBody>
-          <a:bodyPr/>
-          <a:lstStyle/>
-          <a:p>
-            <a:fld id="{407C8B75-4858-41E6-BEC3-A0853FA4AC5B}" type="slidenum">
-              <a:rPr lang="en-US" smtClean="0"/>
-              <a:pPr/>
-              <a:t>11</a:t>
-            </a:fld>
-            <a:endParaRPr lang="en-US" dirty="0"/>
-          </a:p>
-        </p:txBody>
-      </p:sp>
-    </p:spTree>
-    <p:extLst>
-      <p:ext uri="{BB962C8B-B14F-4D97-AF65-F5344CB8AC3E}">
-        <p14:creationId xmlns:p14="http://schemas.microsoft.com/office/powerpoint/2010/main" val="4000504098"/>
-      </p:ext>
-    </p:extLst>
-  </p:cSld>
-  <p:clrMapOvr>
-    <a:masterClrMapping/>
-  </p:clrMapOvr>
-</p:sld>
-</file>
-
 <file path=ppt/slides/slide12.xml><?xml version="1.0" encoding="utf-8"?>
 <p:sld xmlns:a="http://schemas.openxmlformats.org/drawingml/2006/main" xmlns:r="http://schemas.openxmlformats.org/officeDocument/2006/relationships" xmlns:p="http://schemas.openxmlformats.org/presentationml/2006/main">
   <p:cSld>
@@ -4522,6 +4656,428 @@
             <p:ph type="title"/>
           </p:nvPr>
         </p:nvSpPr>
+        <p:spPr/>
+        <p:txBody>
+          <a:bodyPr/>
+          <a:lstStyle/>
+          <a:p>
+            <a:r>
+              <a:rPr lang="en-US" dirty="0"/>
+              <a:t>Replicas of a partition</a:t>
+            </a:r>
+          </a:p>
+        </p:txBody>
+      </p:sp>
+      <p:sp>
+        <p:nvSpPr>
+          <p:cNvPr id="35" name="Content Placeholder 2"/>
+          <p:cNvSpPr>
+            <a:spLocks noGrp="1"/>
+          </p:cNvSpPr>
+          <p:nvPr>
+            <p:ph idx="1"/>
+          </p:nvPr>
+        </p:nvSpPr>
+        <p:spPr/>
+        <p:txBody>
+          <a:bodyPr/>
+          <a:lstStyle/>
+          <a:p>
+            <a:r>
+              <a:rPr lang="en-US" b="1" dirty="0"/>
+              <a:t>Replicas: </a:t>
+            </a:r>
+            <a:r>
+              <a:rPr lang="en-US" dirty="0"/>
+              <a:t>“backups” of a partition</a:t>
+            </a:r>
+          </a:p>
+          <a:p>
+            <a:pPr lvl="1"/>
+            <a:r>
+              <a:rPr lang="en-US" dirty="0">
+                <a:sym typeface="Wingdings"/>
+              </a:rPr>
+              <a:t>They exist solely to prevent data loss.</a:t>
+            </a:r>
+          </a:p>
+          <a:p>
+            <a:pPr lvl="1"/>
+            <a:r>
+              <a:rPr lang="en-US" dirty="0">
+                <a:sym typeface="Wingdings"/>
+              </a:rPr>
+              <a:t>Replicas are never read from, never written to.</a:t>
+            </a:r>
+          </a:p>
+          <a:p>
+            <a:pPr lvl="2"/>
+            <a:r>
+              <a:rPr lang="en-US" dirty="0">
+                <a:sym typeface="Wingdings"/>
+              </a:rPr>
+              <a:t>They do NOT help to increase producer or consumer parallelism!</a:t>
+            </a:r>
+          </a:p>
+          <a:p>
+            <a:pPr lvl="1"/>
+            <a:r>
+              <a:rPr lang="en-US" dirty="0">
+                <a:sym typeface="Wingdings"/>
+              </a:rPr>
+              <a:t>Kafka tolerates </a:t>
+            </a:r>
+            <a:r>
+              <a:rPr lang="en-US" i="1" dirty="0">
+                <a:sym typeface="Wingdings"/>
+              </a:rPr>
+              <a:t>(numReplicas - 1)</a:t>
+            </a:r>
+            <a:r>
+              <a:rPr lang="en-US" dirty="0">
+                <a:sym typeface="Wingdings"/>
+              </a:rPr>
+              <a:t> dead brokers before losing data</a:t>
+            </a:r>
+          </a:p>
+          <a:p>
+            <a:pPr lvl="2"/>
+            <a:r>
+              <a:rPr lang="en-US" dirty="0">
+                <a:sym typeface="Wingdings"/>
+              </a:rPr>
+              <a:t>LinkedIn: numReplicas == 2  1 broker can die</a:t>
+            </a:r>
+          </a:p>
+        </p:txBody>
+      </p:sp>
+      <p:sp>
+        <p:nvSpPr>
+          <p:cNvPr id="5" name="Slide Number Placeholder 4"/>
+          <p:cNvSpPr>
+            <a:spLocks noGrp="1"/>
+          </p:cNvSpPr>
+          <p:nvPr>
+            <p:ph type="sldNum" sz="quarter" idx="12"/>
+          </p:nvPr>
+        </p:nvSpPr>
+        <p:spPr/>
+        <p:txBody>
+          <a:bodyPr/>
+          <a:lstStyle/>
+          <a:p>
+            <a:fld id="{407C8B75-4858-41E6-BEC3-A0853FA4AC5B}" type="slidenum">
+              <a:rPr lang="en-US" smtClean="0"/>
+              <a:pPr/>
+              <a:t>12</a:t>
+            </a:fld>
+            <a:endParaRPr lang="en-US" dirty="0"/>
+          </a:p>
+        </p:txBody>
+      </p:sp>
+    </p:spTree>
+    <p:extLst>
+      <p:ext uri="{BB962C8B-B14F-4D97-AF65-F5344CB8AC3E}">
+        <p14:creationId xmlns:p14="http://schemas.microsoft.com/office/powerpoint/2010/main" val="4000504098"/>
+      </p:ext>
+    </p:extLst>
+  </p:cSld>
+  <p:clrMapOvr>
+    <a:masterClrMapping/>
+  </p:clrMapOvr>
+</p:sld>
+</file>
+
+<file path=ppt/slides/slide13.xml><?xml version="1.0" encoding="utf-8"?>
+<p:sld xmlns:a="http://schemas.openxmlformats.org/drawingml/2006/main" xmlns:r="http://schemas.openxmlformats.org/officeDocument/2006/relationships" xmlns:p="http://schemas.openxmlformats.org/presentationml/2006/main">
+  <p:cSld>
+    <p:spTree>
+      <p:nvGrpSpPr>
+        <p:cNvPr id="1" name=""/>
+        <p:cNvGrpSpPr/>
+        <p:nvPr/>
+      </p:nvGrpSpPr>
+      <p:grpSpPr>
+        <a:xfrm>
+          <a:off x="0" y="0"/>
+          <a:ext cx="0" cy="0"/>
+          <a:chOff x="0" y="0"/>
+          <a:chExt cx="0" cy="0"/>
+        </a:xfrm>
+      </p:grpSpPr>
+      <p:sp>
+        <p:nvSpPr>
+          <p:cNvPr id="2" name="Title 1">
+            <a:extLst>
+              <a:ext uri="{FF2B5EF4-FFF2-40B4-BE49-F238E27FC236}">
+                <a16:creationId xmlns:a16="http://schemas.microsoft.com/office/drawing/2014/main" id="{644DA45C-170E-407A-959B-EFE5D8529EAF}"/>
+              </a:ext>
+            </a:extLst>
+          </p:cNvPr>
+          <p:cNvSpPr>
+            <a:spLocks noGrp="1"/>
+          </p:cNvSpPr>
+          <p:nvPr>
+            <p:ph type="title"/>
+          </p:nvPr>
+        </p:nvSpPr>
+        <p:spPr/>
+        <p:txBody>
+          <a:bodyPr/>
+          <a:lstStyle/>
+          <a:p>
+            <a:r>
+              <a:rPr lang="en-IN" dirty="0"/>
+              <a:t>Acknowledgements in Kafka</a:t>
+            </a:r>
+          </a:p>
+        </p:txBody>
+      </p:sp>
+      <p:sp>
+        <p:nvSpPr>
+          <p:cNvPr id="4" name="TextBox 3">
+            <a:extLst>
+              <a:ext uri="{FF2B5EF4-FFF2-40B4-BE49-F238E27FC236}">
+                <a16:creationId xmlns:a16="http://schemas.microsoft.com/office/drawing/2014/main" id="{1AA156D9-BD74-1C71-9480-7315E4668DF4}"/>
+              </a:ext>
+            </a:extLst>
+          </p:cNvPr>
+          <p:cNvSpPr txBox="1"/>
+          <p:nvPr/>
+        </p:nvSpPr>
+        <p:spPr>
+          <a:xfrm>
+            <a:off x="838200" y="1854210"/>
+            <a:ext cx="4724400" cy="4154984"/>
+          </a:xfrm>
+          <a:prstGeom prst="rect">
+            <a:avLst/>
+          </a:prstGeom>
+          <a:noFill/>
+        </p:spPr>
+        <p:txBody>
+          <a:bodyPr wrap="square">
+            <a:spAutoFit/>
+          </a:bodyPr>
+          <a:lstStyle/>
+          <a:p>
+            <a:r>
+              <a:rPr lang="en-US" sz="2800" b="0" i="0" dirty="0">
+                <a:effectLst/>
+                <a:latin typeface="Nunito" pitchFamily="2" charset="0"/>
+              </a:rPr>
+              <a:t>Producer Acknowledgements in Kafka</a:t>
+            </a:r>
+          </a:p>
+          <a:p>
+            <a:endParaRPr lang="en-US" dirty="0">
+              <a:latin typeface="Nunito" pitchFamily="2" charset="0"/>
+            </a:endParaRPr>
+          </a:p>
+          <a:p>
+            <a:r>
+              <a:rPr lang="en-US" b="1" i="0" dirty="0">
+                <a:effectLst/>
+                <a:latin typeface="Nunito" pitchFamily="2" charset="0"/>
+              </a:rPr>
+              <a:t>acks=0: </a:t>
+            </a:r>
+            <a:r>
+              <a:rPr lang="en-US" b="0" i="0" dirty="0">
+                <a:effectLst/>
+                <a:latin typeface="Nunito" pitchFamily="2" charset="0"/>
+              </a:rPr>
+              <a:t>No acknowledgment (fire and forget)</a:t>
+            </a:r>
+          </a:p>
+          <a:p>
+            <a:r>
+              <a:rPr lang="en-US" b="1" i="0" dirty="0">
+                <a:effectLst/>
+                <a:latin typeface="Nunito" pitchFamily="2" charset="0"/>
+              </a:rPr>
+              <a:t>acks=1: </a:t>
+            </a:r>
+            <a:r>
+              <a:rPr lang="en-US" b="0" i="0" dirty="0">
+                <a:effectLst/>
+                <a:latin typeface="Nunito" pitchFamily="2" charset="0"/>
+              </a:rPr>
+              <a:t>Leader acknowledgment only</a:t>
+            </a:r>
+          </a:p>
+          <a:p>
+            <a:r>
+              <a:rPr lang="en-US" b="1" i="0" dirty="0">
+                <a:effectLst/>
+                <a:latin typeface="Nunito" pitchFamily="2" charset="0"/>
+              </a:rPr>
+              <a:t>acks=all: </a:t>
+            </a:r>
+            <a:r>
+              <a:rPr lang="en-US" b="0" i="0" dirty="0">
+                <a:effectLst/>
+                <a:latin typeface="Nunito" pitchFamily="2" charset="0"/>
+              </a:rPr>
+              <a:t>Full ISR (In-Sync Replica) acknowledgment The choice affects the trade-off between latency and durability. Higher levels of acknowledgment provide stronger durability guarantees but increase latency.</a:t>
+            </a:r>
+            <a:endParaRPr lang="en-IN" dirty="0"/>
+          </a:p>
+        </p:txBody>
+      </p:sp>
+      <p:sp>
+        <p:nvSpPr>
+          <p:cNvPr id="6" name="TextBox 5">
+            <a:extLst>
+              <a:ext uri="{FF2B5EF4-FFF2-40B4-BE49-F238E27FC236}">
+                <a16:creationId xmlns:a16="http://schemas.microsoft.com/office/drawing/2014/main" id="{1DCB2EC2-ED79-6EFA-64F1-F8DDAF2ACC18}"/>
+              </a:ext>
+            </a:extLst>
+          </p:cNvPr>
+          <p:cNvSpPr txBox="1"/>
+          <p:nvPr/>
+        </p:nvSpPr>
+        <p:spPr>
+          <a:xfrm>
+            <a:off x="5889171" y="1716098"/>
+            <a:ext cx="6096000" cy="3734356"/>
+          </a:xfrm>
+          <a:prstGeom prst="rect">
+            <a:avLst/>
+          </a:prstGeom>
+          <a:noFill/>
+        </p:spPr>
+        <p:txBody>
+          <a:bodyPr wrap="square">
+            <a:spAutoFit/>
+          </a:bodyPr>
+          <a:lstStyle/>
+          <a:p>
+            <a:pPr algn="l" rtl="0" fontAlgn="base">
+              <a:spcAft>
+                <a:spcPts val="750"/>
+              </a:spcAft>
+              <a:buNone/>
+            </a:pPr>
+            <a:r>
+              <a:rPr lang="en-US" sz="2800" b="0" i="0" dirty="0">
+                <a:effectLst/>
+                <a:latin typeface="Nunito" pitchFamily="2" charset="0"/>
+              </a:rPr>
+              <a:t>Message delivery semantics: (Consumer side)</a:t>
+            </a:r>
+          </a:p>
+          <a:p>
+            <a:pPr algn="l" fontAlgn="base">
+              <a:spcAft>
+                <a:spcPts val="1800"/>
+              </a:spcAft>
+              <a:buFont typeface="Arial" panose="020B0604020202020204" pitchFamily="34" charset="0"/>
+              <a:buChar char="•"/>
+            </a:pPr>
+            <a:r>
+              <a:rPr lang="en-US" b="1" i="0" dirty="0">
+                <a:effectLst/>
+                <a:latin typeface="Nunito" pitchFamily="2" charset="0"/>
+              </a:rPr>
+              <a:t>At most once:</a:t>
+            </a:r>
+            <a:r>
+              <a:rPr lang="en-US" b="0" i="0" dirty="0">
+                <a:effectLst/>
+                <a:latin typeface="Nunito" pitchFamily="2" charset="0"/>
+              </a:rPr>
+              <a:t> Messages may be lost but are never redelivered.</a:t>
+            </a:r>
+          </a:p>
+          <a:p>
+            <a:pPr algn="l" fontAlgn="base">
+              <a:spcAft>
+                <a:spcPts val="1800"/>
+              </a:spcAft>
+              <a:buFont typeface="Arial" panose="020B0604020202020204" pitchFamily="34" charset="0"/>
+              <a:buChar char="•"/>
+            </a:pPr>
+            <a:r>
+              <a:rPr lang="en-US" b="1" i="0" dirty="0">
+                <a:effectLst/>
+                <a:latin typeface="Nunito" pitchFamily="2" charset="0"/>
+              </a:rPr>
+              <a:t>At least once:</a:t>
+            </a:r>
+            <a:r>
+              <a:rPr lang="en-US" b="0" i="0" dirty="0">
+                <a:effectLst/>
+                <a:latin typeface="Nunito" pitchFamily="2" charset="0"/>
+              </a:rPr>
+              <a:t> Messages are never lost but may be redelivered.</a:t>
+            </a:r>
+          </a:p>
+          <a:p>
+            <a:pPr algn="l" fontAlgn="base">
+              <a:spcAft>
+                <a:spcPts val="1800"/>
+              </a:spcAft>
+              <a:buFont typeface="Arial" panose="020B0604020202020204" pitchFamily="34" charset="0"/>
+              <a:buChar char="•"/>
+            </a:pPr>
+            <a:r>
+              <a:rPr lang="en-US" b="1" i="0" dirty="0">
+                <a:effectLst/>
+                <a:latin typeface="Nunito" pitchFamily="2" charset="0"/>
+              </a:rPr>
+              <a:t>Exactly once:</a:t>
+            </a:r>
+            <a:r>
+              <a:rPr lang="en-US" b="0" i="0" dirty="0">
+                <a:effectLst/>
+                <a:latin typeface="Nunito" pitchFamily="2" charset="0"/>
+              </a:rPr>
+              <a:t> Each message is delivered once and only once. The choice depends on the specific use case and can be configured through producer and consumer settings.</a:t>
+            </a:r>
+          </a:p>
+        </p:txBody>
+      </p:sp>
+    </p:spTree>
+    <p:extLst>
+      <p:ext uri="{BB962C8B-B14F-4D97-AF65-F5344CB8AC3E}">
+        <p14:creationId xmlns:p14="http://schemas.microsoft.com/office/powerpoint/2010/main" val="1768370570"/>
+      </p:ext>
+    </p:extLst>
+  </p:cSld>
+  <p:clrMapOvr>
+    <a:masterClrMapping/>
+  </p:clrMapOvr>
+</p:sld>
+</file>
+
+<file path=ppt/slides/slide14.xml><?xml version="1.0" encoding="utf-8"?>
+<p:sld xmlns:a="http://schemas.openxmlformats.org/drawingml/2006/main" xmlns:r="http://schemas.openxmlformats.org/officeDocument/2006/relationships" xmlns:p="http://schemas.openxmlformats.org/presentationml/2006/main">
+  <p:cSld>
+    <p:spTree>
+      <p:nvGrpSpPr>
+        <p:cNvPr id="1" name=""/>
+        <p:cNvGrpSpPr/>
+        <p:nvPr/>
+      </p:nvGrpSpPr>
+      <p:grpSpPr>
+        <a:xfrm>
+          <a:off x="0" y="0"/>
+          <a:ext cx="0" cy="0"/>
+          <a:chOff x="0" y="0"/>
+          <a:chExt cx="0" cy="0"/>
+        </a:xfrm>
+      </p:grpSpPr>
+      <p:sp>
+        <p:nvSpPr>
+          <p:cNvPr id="2" name="Title 1"/>
+          <p:cNvSpPr>
+            <a:spLocks noGrp="1"/>
+          </p:cNvSpPr>
+          <p:nvPr>
+            <p:ph type="title"/>
+          </p:nvPr>
+        </p:nvSpPr>
         <p:spPr>
           <a:xfrm>
             <a:off x="70757" y="-5669"/>
@@ -4569,7 +5125,7 @@
             <a:fld id="{407C8B75-4858-41E6-BEC3-A0853FA4AC5B}" type="slidenum">
               <a:rPr lang="en-US" smtClean="0"/>
               <a:pPr/>
-              <a:t>12</a:t>
+              <a:t>14</a:t>
             </a:fld>
             <a:endParaRPr lang="en-US" dirty="0"/>
           </a:p>
@@ -4618,7 +5174,7 @@
 </p:sld>
 </file>
 
-<file path=ppt/slides/slide13.xml><?xml version="1.0" encoding="utf-8"?>
+<file path=ppt/slides/slide15.xml><?xml version="1.0" encoding="utf-8"?>
 <p:sld xmlns:a="http://schemas.openxmlformats.org/drawingml/2006/main" xmlns:r="http://schemas.openxmlformats.org/officeDocument/2006/relationships" xmlns:p="http://schemas.openxmlformats.org/presentationml/2006/main">
   <p:cSld>
     <p:spTree>
@@ -4689,7 +5245,7 @@
             <a:fld id="{407C8B75-4858-41E6-BEC3-A0853FA4AC5B}" type="slidenum">
               <a:rPr lang="en-US" smtClean="0"/>
               <a:pPr/>
-              <a:t>13</a:t>
+              <a:t>15</a:t>
             </a:fld>
             <a:endParaRPr lang="en-US" dirty="0"/>
           </a:p>
@@ -5242,7 +5798,7 @@
 </p:sld>
 </file>
 
-<file path=ppt/slides/slide14.xml><?xml version="1.0" encoding="utf-8"?>
+<file path=ppt/slides/slide16.xml><?xml version="1.0" encoding="utf-8"?>
 <p:sld xmlns:a="http://schemas.openxmlformats.org/drawingml/2006/main" xmlns:r="http://schemas.openxmlformats.org/officeDocument/2006/relationships" xmlns:p="http://schemas.openxmlformats.org/presentationml/2006/main">
   <p:cSld>
     <p:spTree>
@@ -5555,7 +6111,7 @@
             <a:fld id="{407C8B75-4858-41E6-BEC3-A0853FA4AC5B}" type="slidenum">
               <a:rPr lang="en-US" smtClean="0"/>
               <a:pPr/>
-              <a:t>14</a:t>
+              <a:t>16</a:t>
             </a:fld>
             <a:endParaRPr lang="en-US" dirty="0"/>
           </a:p>
@@ -5574,7 +6130,7 @@
 </p:sld>
 </file>
 
-<file path=ppt/slides/slide15.xml><?xml version="1.0" encoding="utf-8"?>
+<file path=ppt/slides/slide17.xml><?xml version="1.0" encoding="utf-8"?>
 <p:sld xmlns:a="http://schemas.openxmlformats.org/drawingml/2006/main" xmlns:r="http://schemas.openxmlformats.org/officeDocument/2006/relationships" xmlns:p="http://schemas.openxmlformats.org/presentationml/2006/main">
   <p:cSld>
     <p:spTree>
@@ -6710,6 +7266,362 @@
 </file>
 
 <file path=ppt/slides/slide6.xml><?xml version="1.0" encoding="utf-8"?>
+<p:sld xmlns:a="http://schemas.openxmlformats.org/drawingml/2006/main" xmlns:r="http://schemas.openxmlformats.org/officeDocument/2006/relationships" xmlns:p="http://schemas.openxmlformats.org/presentationml/2006/main">
+  <p:cSld>
+    <p:spTree>
+      <p:nvGrpSpPr>
+        <p:cNvPr id="1" name=""/>
+        <p:cNvGrpSpPr/>
+        <p:nvPr/>
+      </p:nvGrpSpPr>
+      <p:grpSpPr>
+        <a:xfrm>
+          <a:off x="0" y="0"/>
+          <a:ext cx="0" cy="0"/>
+          <a:chOff x="0" y="0"/>
+          <a:chExt cx="0" cy="0"/>
+        </a:xfrm>
+      </p:grpSpPr>
+      <p:sp>
+        <p:nvSpPr>
+          <p:cNvPr id="2" name="Title 1">
+            <a:extLst>
+              <a:ext uri="{FF2B5EF4-FFF2-40B4-BE49-F238E27FC236}">
+                <a16:creationId xmlns:a16="http://schemas.microsoft.com/office/drawing/2014/main" id="{175EA5FC-C2E5-1B32-3A90-1CD1EF38D9E8}"/>
+              </a:ext>
+            </a:extLst>
+          </p:cNvPr>
+          <p:cNvSpPr>
+            <a:spLocks noGrp="1"/>
+          </p:cNvSpPr>
+          <p:nvPr>
+            <p:ph type="title"/>
+          </p:nvPr>
+        </p:nvSpPr>
+        <p:spPr>
+          <a:xfrm>
+            <a:off x="838200" y="365126"/>
+            <a:ext cx="10515600" cy="298904"/>
+          </a:xfrm>
+        </p:spPr>
+        <p:txBody>
+          <a:bodyPr>
+            <a:normAutofit fontScale="90000"/>
+          </a:bodyPr>
+          <a:lstStyle/>
+          <a:p>
+            <a:r>
+              <a:rPr lang="en-IN" i="0" dirty="0">
+                <a:solidFill>
+                  <a:srgbClr val="1A2C47"/>
+                </a:solidFill>
+                <a:effectLst/>
+                <a:latin typeface="__Source_Sans_Pro_2fe30b"/>
+              </a:rPr>
+              <a:t>Roles of ZooKeeper in Kafka</a:t>
+            </a:r>
+            <a:endParaRPr lang="en-IN" dirty="0"/>
+          </a:p>
+        </p:txBody>
+      </p:sp>
+      <p:sp>
+        <p:nvSpPr>
+          <p:cNvPr id="4" name="TextBox 3">
+            <a:extLst>
+              <a:ext uri="{FF2B5EF4-FFF2-40B4-BE49-F238E27FC236}">
+                <a16:creationId xmlns:a16="http://schemas.microsoft.com/office/drawing/2014/main" id="{D0873046-5854-1465-1B49-C3A336B0C179}"/>
+              </a:ext>
+            </a:extLst>
+          </p:cNvPr>
+          <p:cNvSpPr txBox="1"/>
+          <p:nvPr/>
+        </p:nvSpPr>
+        <p:spPr>
+          <a:xfrm>
+            <a:off x="391886" y="856518"/>
+            <a:ext cx="5431971" cy="4801314"/>
+          </a:xfrm>
+          <a:prstGeom prst="rect">
+            <a:avLst/>
+          </a:prstGeom>
+          <a:noFill/>
+        </p:spPr>
+        <p:txBody>
+          <a:bodyPr wrap="square">
+            <a:spAutoFit/>
+          </a:bodyPr>
+          <a:lstStyle/>
+          <a:p>
+            <a:r>
+              <a:rPr lang="en-US" b="1" dirty="0"/>
+              <a:t>In Kafka Brokers</a:t>
+            </a:r>
+          </a:p>
+          <a:p>
+            <a:endParaRPr lang="en-US" dirty="0"/>
+          </a:p>
+          <a:p>
+            <a:pPr marL="285750" indent="-285750">
+              <a:buFont typeface="Arial" panose="020B0604020202020204" pitchFamily="34" charset="0"/>
+              <a:buChar char="•"/>
+            </a:pPr>
+            <a:r>
+              <a:rPr lang="en-US" b="1" dirty="0"/>
+              <a:t>Registration of Broker: </a:t>
+            </a:r>
+            <a:r>
+              <a:rPr lang="en-US" dirty="0"/>
+              <a:t>Kafka brokers register with ZooKeeper to enable other brokers and clients to find and contact them, and ZooKeeper keeps track of active brokers and their connection information.</a:t>
+            </a:r>
+          </a:p>
+          <a:p>
+            <a:pPr marL="285750" indent="-285750">
+              <a:buFont typeface="Arial" panose="020B0604020202020204" pitchFamily="34" charset="0"/>
+              <a:buChar char="•"/>
+            </a:pPr>
+            <a:r>
+              <a:rPr lang="en-US" b="1" dirty="0"/>
+              <a:t>Membership of Cluster: </a:t>
+            </a:r>
+            <a:r>
+              <a:rPr lang="en-US" dirty="0"/>
+              <a:t>ZooKeeper keeps track of the Kafka cluster's active brokers and stores membership information, allowing for dynamic cluster membership changes and a current view.</a:t>
+            </a:r>
+          </a:p>
+          <a:p>
+            <a:pPr marL="285750" indent="-285750">
+              <a:buFont typeface="Arial" panose="020B0604020202020204" pitchFamily="34" charset="0"/>
+              <a:buChar char="•"/>
+            </a:pPr>
+            <a:r>
+              <a:rPr lang="en-US" b="1" dirty="0"/>
+              <a:t>Controller Election: </a:t>
+            </a:r>
+            <a:r>
+              <a:rPr lang="en-US" dirty="0"/>
+              <a:t>ZooKeeper makes the controller election process easier by ensuring that only one broker is the controller at any given time.</a:t>
+            </a:r>
+          </a:p>
+          <a:p>
+            <a:pPr marL="285750" indent="-285750">
+              <a:buFont typeface="Arial" panose="020B0604020202020204" pitchFamily="34" charset="0"/>
+              <a:buChar char="•"/>
+            </a:pPr>
+            <a:r>
+              <a:rPr lang="en-US" b="1" dirty="0"/>
+              <a:t>Cluster Events and Alerts: </a:t>
+            </a:r>
+            <a:r>
+              <a:rPr lang="en-US" dirty="0"/>
+              <a:t>ZooKeeper sends alerts to Kafka brokers about cluster events and changes. For example, if a broker fails or quits the cluster, ZooKeeper can alert the other brokers.</a:t>
+            </a:r>
+            <a:endParaRPr lang="en-IN" dirty="0"/>
+          </a:p>
+        </p:txBody>
+      </p:sp>
+      <p:sp>
+        <p:nvSpPr>
+          <p:cNvPr id="8" name="TextBox 7">
+            <a:extLst>
+              <a:ext uri="{FF2B5EF4-FFF2-40B4-BE49-F238E27FC236}">
+                <a16:creationId xmlns:a16="http://schemas.microsoft.com/office/drawing/2014/main" id="{94D90D0E-D483-0B81-BB55-13AA336B0713}"/>
+              </a:ext>
+            </a:extLst>
+          </p:cNvPr>
+          <p:cNvSpPr txBox="1"/>
+          <p:nvPr/>
+        </p:nvSpPr>
+        <p:spPr>
+          <a:xfrm>
+            <a:off x="6085114" y="889843"/>
+            <a:ext cx="5715000" cy="5078313"/>
+          </a:xfrm>
+          <a:prstGeom prst="rect">
+            <a:avLst/>
+          </a:prstGeom>
+          <a:noFill/>
+        </p:spPr>
+        <p:txBody>
+          <a:bodyPr wrap="square">
+            <a:spAutoFit/>
+          </a:bodyPr>
+          <a:lstStyle/>
+          <a:p>
+            <a:pPr algn="l">
+              <a:buNone/>
+            </a:pPr>
+            <a:r>
+              <a:rPr lang="en-US" b="1" i="0" dirty="0">
+                <a:solidFill>
+                  <a:srgbClr val="1A2C47"/>
+                </a:solidFill>
+                <a:effectLst/>
+                <a:latin typeface="__Source_Sans_Pro_2fe30b"/>
+              </a:rPr>
+              <a:t>In Kafka Consumers</a:t>
+            </a:r>
+          </a:p>
+          <a:p>
+            <a:pPr algn="l">
+              <a:buFont typeface="Arial" panose="020B0604020202020204" pitchFamily="34" charset="0"/>
+              <a:buChar char="•"/>
+            </a:pPr>
+            <a:r>
+              <a:rPr lang="en-US" b="1" i="0" dirty="0">
+                <a:solidFill>
+                  <a:srgbClr val="61738E"/>
+                </a:solidFill>
+                <a:effectLst/>
+                <a:latin typeface="__Source_Sans_Pro_2fe30b"/>
+              </a:rPr>
+              <a:t>Cluster Coordination: </a:t>
+            </a:r>
+            <a:r>
+              <a:rPr lang="en-US" b="0" i="0" dirty="0">
+                <a:solidFill>
+                  <a:srgbClr val="61738E"/>
+                </a:solidFill>
+                <a:effectLst/>
+                <a:latin typeface="__Source_Sans_Pro_2fe30b"/>
+              </a:rPr>
+              <a:t>ZooKeeper is responsible for arranging consumer groups in Kafka and keeping track of active groups and their members, as well as group membership information such as customers and partitions.</a:t>
+            </a:r>
+          </a:p>
+          <a:p>
+            <a:pPr algn="l">
+              <a:buFont typeface="Arial" panose="020B0604020202020204" pitchFamily="34" charset="0"/>
+              <a:buChar char="•"/>
+            </a:pPr>
+            <a:r>
+              <a:rPr lang="en-US" b="1" i="0" dirty="0">
+                <a:solidFill>
+                  <a:srgbClr val="61738E"/>
+                </a:solidFill>
+                <a:effectLst/>
+                <a:latin typeface="__Source_Sans_Pro_2fe30b"/>
+              </a:rPr>
+              <a:t>Group Membership and Rebalancing: </a:t>
+            </a:r>
+            <a:r>
+              <a:rPr lang="en-US" b="0" i="0" dirty="0">
+                <a:solidFill>
+                  <a:srgbClr val="61738E"/>
+                </a:solidFill>
+                <a:effectLst/>
+                <a:latin typeface="__Source_Sans_Pro_2fe30b"/>
+              </a:rPr>
+              <a:t>ZooKeeper simplifies group membership management by assigning partitions fairly among active consumers and coordinating the partition reassignment process when group membership changes.</a:t>
+            </a:r>
+          </a:p>
+          <a:p>
+            <a:pPr algn="l">
+              <a:buFont typeface="Arial" panose="020B0604020202020204" pitchFamily="34" charset="0"/>
+              <a:buChar char="•"/>
+            </a:pPr>
+            <a:r>
+              <a:rPr lang="en-US" b="1" i="0" dirty="0">
+                <a:solidFill>
+                  <a:srgbClr val="61738E"/>
+                </a:solidFill>
+                <a:effectLst/>
+                <a:latin typeface="__Source_Sans_Pro_2fe30b"/>
+              </a:rPr>
+              <a:t>Offset Commitment: </a:t>
+            </a:r>
+            <a:r>
+              <a:rPr lang="en-US" b="0" i="0" dirty="0">
+                <a:solidFill>
+                  <a:srgbClr val="61738E"/>
+                </a:solidFill>
+                <a:effectLst/>
+                <a:latin typeface="__Source_Sans_Pro_2fe30b"/>
+              </a:rPr>
+              <a:t>Kafka consumers store their current offset, which can be managed by ZooKeeper, which maintains committed offset information for each consumer group.</a:t>
+            </a:r>
+          </a:p>
+          <a:p>
+            <a:pPr algn="l">
+              <a:buFont typeface="Arial" panose="020B0604020202020204" pitchFamily="34" charset="0"/>
+              <a:buChar char="•"/>
+            </a:pPr>
+            <a:r>
+              <a:rPr lang="en-US" b="1" i="0" dirty="0">
+                <a:solidFill>
+                  <a:srgbClr val="61738E"/>
+                </a:solidFill>
+                <a:effectLst/>
+                <a:latin typeface="__Source_Sans_Pro_2fe30b"/>
+              </a:rPr>
+              <a:t>Consumer Metadata: </a:t>
+            </a:r>
+            <a:r>
+              <a:rPr lang="en-US" b="0" i="0" dirty="0">
+                <a:solidFill>
+                  <a:srgbClr val="61738E"/>
+                </a:solidFill>
+                <a:effectLst/>
+                <a:latin typeface="__Source_Sans_Pro_2fe30b"/>
+              </a:rPr>
+              <a:t>ZooKeeper saves consumer-related metadata, which other components or monitoring systems can utilize to track the progress and status of individual consumers or consumer groups.</a:t>
+            </a:r>
+          </a:p>
+        </p:txBody>
+      </p:sp>
+      <p:sp>
+        <p:nvSpPr>
+          <p:cNvPr id="10" name="TextBox 9">
+            <a:extLst>
+              <a:ext uri="{FF2B5EF4-FFF2-40B4-BE49-F238E27FC236}">
+                <a16:creationId xmlns:a16="http://schemas.microsoft.com/office/drawing/2014/main" id="{BEC2EC7C-4479-8F12-8611-660F1293DFEA}"/>
+              </a:ext>
+            </a:extLst>
+          </p:cNvPr>
+          <p:cNvSpPr txBox="1"/>
+          <p:nvPr/>
+        </p:nvSpPr>
+        <p:spPr>
+          <a:xfrm>
+            <a:off x="1382485" y="6308208"/>
+            <a:ext cx="10711543" cy="369332"/>
+          </a:xfrm>
+          <a:prstGeom prst="rect">
+            <a:avLst/>
+          </a:prstGeom>
+          <a:noFill/>
+        </p:spPr>
+        <p:txBody>
+          <a:bodyPr wrap="square">
+            <a:spAutoFit/>
+          </a:bodyPr>
+          <a:lstStyle/>
+          <a:p>
+            <a:r>
+              <a:rPr lang="en-IN" dirty="0">
+                <a:hlinkClick r:id="rId2"/>
+              </a:rPr>
+              <a:t>https://www.scaler.com/topics/kafka-tutorial/the-role-of-zookeeper-in-the-kafka-cluster/</a:t>
+            </a:r>
+            <a:r>
+              <a:rPr lang="en-IN" dirty="0"/>
+              <a:t> </a:t>
+            </a:r>
+          </a:p>
+        </p:txBody>
+      </p:sp>
+    </p:spTree>
+    <p:extLst>
+      <p:ext uri="{BB962C8B-B14F-4D97-AF65-F5344CB8AC3E}">
+        <p14:creationId xmlns:p14="http://schemas.microsoft.com/office/powerpoint/2010/main" val="1588158112"/>
+      </p:ext>
+    </p:extLst>
+  </p:cSld>
+  <p:clrMapOvr>
+    <a:masterClrMapping/>
+  </p:clrMapOvr>
+</p:sld>
+</file>
+
+<file path=ppt/slides/slide7.xml><?xml version="1.0" encoding="utf-8"?>
 <p:sld xmlns:a="http://schemas.openxmlformats.org/drawingml/2006/main" xmlns:r="http://schemas.openxmlformats.org/officeDocument/2006/relationships" xmlns:p="http://schemas.openxmlformats.org/presentationml/2006/main">
   <p:cSld>
     <p:spTree>
@@ -6865,7 +7777,7 @@
             <a:fld id="{407C8B75-4858-41E6-BEC3-A0853FA4AC5B}" type="slidenum">
               <a:rPr lang="en-US" smtClean="0"/>
               <a:pPr/>
-              <a:t>6</a:t>
+              <a:t>7</a:t>
             </a:fld>
             <a:endParaRPr lang="en-US" dirty="0"/>
           </a:p>
@@ -7936,7 +8848,7 @@
 </p:sld>
 </file>
 
-<file path=ppt/slides/slide7.xml><?xml version="1.0" encoding="utf-8"?>
+<file path=ppt/slides/slide8.xml><?xml version="1.0" encoding="utf-8"?>
 <p:sld xmlns:a="http://schemas.openxmlformats.org/drawingml/2006/main" xmlns:r="http://schemas.openxmlformats.org/officeDocument/2006/relationships" xmlns:p="http://schemas.openxmlformats.org/presentationml/2006/main">
   <p:cSld>
     <p:spTree>
@@ -8085,7 +8997,7 @@
             <a:fld id="{407C8B75-4858-41E6-BEC3-A0853FA4AC5B}" type="slidenum">
               <a:rPr lang="en-US" smtClean="0"/>
               <a:pPr/>
-              <a:t>7</a:t>
+              <a:t>8</a:t>
             </a:fld>
             <a:endParaRPr lang="en-US" dirty="0"/>
           </a:p>
@@ -9120,7 +10032,7 @@
 </p:sld>
 </file>
 
-<file path=ppt/slides/slide8.xml><?xml version="1.0" encoding="utf-8"?>
+<file path=ppt/slides/slide9.xml><?xml version="1.0" encoding="utf-8"?>
 <p:sld xmlns:a="http://schemas.openxmlformats.org/drawingml/2006/main" xmlns:r="http://schemas.openxmlformats.org/officeDocument/2006/relationships" xmlns:p="http://schemas.openxmlformats.org/presentationml/2006/main">
   <p:cSld>
     <p:spTree>
@@ -9189,7 +10101,7 @@
             <a:fld id="{407C8B75-4858-41E6-BEC3-A0853FA4AC5B}" type="slidenum">
               <a:rPr lang="en-US" smtClean="0"/>
               <a:pPr/>
-              <a:t>8</a:t>
+              <a:t>9</a:t>
             </a:fld>
             <a:endParaRPr lang="en-US" dirty="0"/>
           </a:p>
@@ -9374,297 +10286,6 @@
     <p:extLst>
       <p:ext uri="{BB962C8B-B14F-4D97-AF65-F5344CB8AC3E}">
         <p14:creationId xmlns:p14="http://schemas.microsoft.com/office/powerpoint/2010/main" val="715760960"/>
-      </p:ext>
-    </p:extLst>
-  </p:cSld>
-  <p:clrMapOvr>
-    <a:masterClrMapping/>
-  </p:clrMapOvr>
-</p:sld>
-</file>
-
-<file path=ppt/slides/slide9.xml><?xml version="1.0" encoding="utf-8"?>
-<p:sld xmlns:a="http://schemas.openxmlformats.org/drawingml/2006/main" xmlns:r="http://schemas.openxmlformats.org/officeDocument/2006/relationships" xmlns:p="http://schemas.openxmlformats.org/presentationml/2006/main">
-  <p:cSld>
-    <p:spTree>
-      <p:nvGrpSpPr>
-        <p:cNvPr id="1" name=""/>
-        <p:cNvGrpSpPr/>
-        <p:nvPr/>
-      </p:nvGrpSpPr>
-      <p:grpSpPr>
-        <a:xfrm>
-          <a:off x="0" y="0"/>
-          <a:ext cx="0" cy="0"/>
-          <a:chOff x="0" y="0"/>
-          <a:chExt cx="0" cy="0"/>
-        </a:xfrm>
-      </p:grpSpPr>
-      <p:sp>
-        <p:nvSpPr>
-          <p:cNvPr id="2" name="Title 1"/>
-          <p:cNvSpPr>
-            <a:spLocks noGrp="1"/>
-          </p:cNvSpPr>
-          <p:nvPr>
-            <p:ph type="title"/>
-          </p:nvPr>
-        </p:nvSpPr>
-        <p:spPr>
-          <a:xfrm>
-            <a:off x="838200" y="365126"/>
-            <a:ext cx="10515600" cy="511026"/>
-          </a:xfrm>
-        </p:spPr>
-        <p:txBody>
-          <a:bodyPr>
-            <a:normAutofit fontScale="90000"/>
-          </a:bodyPr>
-          <a:lstStyle/>
-          <a:p>
-            <a:r>
-              <a:rPr lang="en-US" dirty="0"/>
-              <a:t>Partitions</a:t>
-            </a:r>
-          </a:p>
-        </p:txBody>
-      </p:sp>
-      <p:sp>
-        <p:nvSpPr>
-          <p:cNvPr id="5" name="Slide Number Placeholder 4"/>
-          <p:cNvSpPr>
-            <a:spLocks noGrp="1"/>
-          </p:cNvSpPr>
-          <p:nvPr>
-            <p:ph type="sldNum" sz="quarter" idx="12"/>
-          </p:nvPr>
-        </p:nvSpPr>
-        <p:spPr>
-          <a:xfrm>
-            <a:off x="10198100" y="6537323"/>
-            <a:ext cx="355600" cy="152400"/>
-          </a:xfrm>
-        </p:spPr>
-        <p:txBody>
-          <a:bodyPr/>
-          <a:lstStyle/>
-          <a:p>
-            <a:fld id="{407C8B75-4858-41E6-BEC3-A0853FA4AC5B}" type="slidenum">
-              <a:rPr lang="en-US" smtClean="0"/>
-              <a:pPr/>
-              <a:t>9</a:t>
-            </a:fld>
-            <a:endParaRPr lang="en-US" dirty="0"/>
-          </a:p>
-        </p:txBody>
-      </p:sp>
-      <p:sp>
-        <p:nvSpPr>
-          <p:cNvPr id="35" name="Content Placeholder 2"/>
-          <p:cNvSpPr>
-            <a:spLocks noGrp="1"/>
-          </p:cNvSpPr>
-          <p:nvPr>
-            <p:ph idx="1"/>
-          </p:nvPr>
-        </p:nvSpPr>
-        <p:spPr>
-          <a:xfrm>
-            <a:off x="1981200" y="1078992"/>
-            <a:ext cx="8229600" cy="5255490"/>
-          </a:xfrm>
-        </p:spPr>
-        <p:txBody>
-          <a:bodyPr>
-            <a:normAutofit/>
-          </a:bodyPr>
-          <a:lstStyle/>
-          <a:p>
-            <a:r>
-              <a:rPr lang="en-US" sz="2400" dirty="0"/>
-              <a:t>#partitions of a topic is configurable</a:t>
-            </a:r>
-          </a:p>
-          <a:p>
-            <a:r>
-              <a:rPr lang="en-US" sz="2400" dirty="0"/>
-              <a:t>#partitions determines </a:t>
-            </a:r>
-            <a:r>
-              <a:rPr lang="en-US" sz="2400" b="1" dirty="0"/>
-              <a:t>max</a:t>
-            </a:r>
-            <a:r>
-              <a:rPr lang="en-US" sz="2400" dirty="0"/>
-              <a:t> consumer (group) parallelism</a:t>
-            </a:r>
-          </a:p>
-          <a:p>
-            <a:pPr lvl="1"/>
-            <a:r>
-              <a:rPr lang="en-US" sz="2000" dirty="0"/>
-              <a:t>cf. parallelism of Storm’s KafkaSpout via </a:t>
-            </a:r>
-            <a:r>
-              <a:rPr lang="en-US" sz="1400" dirty="0">
-                <a:latin typeface="Consolas"/>
-                <a:cs typeface="Consolas"/>
-              </a:rPr>
-              <a:t>builder.setSpout(,,</a:t>
-            </a:r>
-            <a:r>
-              <a:rPr lang="en-US" sz="1400" i="1" dirty="0">
-                <a:latin typeface="Consolas"/>
-                <a:cs typeface="Consolas"/>
-              </a:rPr>
-              <a:t>N</a:t>
-            </a:r>
-            <a:r>
-              <a:rPr lang="en-US" sz="1400" dirty="0">
-                <a:latin typeface="Consolas"/>
-                <a:cs typeface="Consolas"/>
-              </a:rPr>
-              <a:t>)</a:t>
-            </a:r>
-          </a:p>
-          <a:p>
-            <a:pPr lvl="1"/>
-            <a:endParaRPr lang="en-US" sz="1400" dirty="0">
-              <a:latin typeface="Consolas"/>
-              <a:cs typeface="Consolas"/>
-            </a:endParaRPr>
-          </a:p>
-          <a:p>
-            <a:pPr lvl="1"/>
-            <a:endParaRPr lang="en-US" sz="1400" dirty="0">
-              <a:latin typeface="Consolas"/>
-              <a:cs typeface="Consolas"/>
-            </a:endParaRPr>
-          </a:p>
-          <a:p>
-            <a:pPr lvl="1"/>
-            <a:endParaRPr lang="en-US" sz="1400" dirty="0">
-              <a:latin typeface="Consolas"/>
-              <a:cs typeface="Consolas"/>
-            </a:endParaRPr>
-          </a:p>
-          <a:p>
-            <a:pPr lvl="1"/>
-            <a:endParaRPr lang="en-US" sz="1400" dirty="0">
-              <a:latin typeface="Consolas"/>
-              <a:cs typeface="Consolas"/>
-            </a:endParaRPr>
-          </a:p>
-          <a:p>
-            <a:pPr lvl="1"/>
-            <a:endParaRPr lang="en-US" sz="1400" dirty="0">
-              <a:latin typeface="Consolas"/>
-              <a:cs typeface="Consolas"/>
-            </a:endParaRPr>
-          </a:p>
-          <a:p>
-            <a:pPr lvl="1"/>
-            <a:endParaRPr lang="en-US" sz="1400" dirty="0">
-              <a:latin typeface="Consolas"/>
-              <a:cs typeface="Consolas"/>
-            </a:endParaRPr>
-          </a:p>
-          <a:p>
-            <a:pPr lvl="1"/>
-            <a:endParaRPr lang="en-US" sz="1400" dirty="0">
-              <a:latin typeface="Consolas"/>
-              <a:cs typeface="Consolas"/>
-            </a:endParaRPr>
-          </a:p>
-          <a:p>
-            <a:pPr lvl="1"/>
-            <a:endParaRPr lang="en-US" sz="1400" dirty="0">
-              <a:latin typeface="Consolas"/>
-              <a:cs typeface="Consolas"/>
-            </a:endParaRPr>
-          </a:p>
-          <a:p>
-            <a:pPr lvl="1"/>
-            <a:endParaRPr lang="en-US" sz="1400" dirty="0">
-              <a:latin typeface="Consolas"/>
-              <a:cs typeface="Consolas"/>
-            </a:endParaRPr>
-          </a:p>
-          <a:p>
-            <a:pPr lvl="1"/>
-            <a:endParaRPr lang="en-US" sz="1400" dirty="0">
-              <a:latin typeface="Consolas"/>
-              <a:cs typeface="Consolas"/>
-            </a:endParaRPr>
-          </a:p>
-          <a:p>
-            <a:pPr lvl="1"/>
-            <a:endParaRPr lang="en-US" sz="1400" dirty="0">
-              <a:latin typeface="Consolas"/>
-              <a:cs typeface="Consolas"/>
-            </a:endParaRPr>
-          </a:p>
-          <a:p>
-            <a:pPr lvl="1"/>
-            <a:endParaRPr lang="en-US" sz="1400" dirty="0">
-              <a:latin typeface="Consolas"/>
-              <a:cs typeface="Consolas"/>
-            </a:endParaRPr>
-          </a:p>
-          <a:p>
-            <a:pPr lvl="1"/>
-            <a:r>
-              <a:rPr lang="en-US" sz="1400" dirty="0">
-                <a:latin typeface="Helvetica"/>
-                <a:cs typeface="Helvetica"/>
-              </a:rPr>
-              <a:t>Consumer group A, with 2 consumers, reads from a 4-partition topic</a:t>
-            </a:r>
-          </a:p>
-          <a:p>
-            <a:pPr lvl="1"/>
-            <a:r>
-              <a:rPr lang="en-US" sz="1400" dirty="0">
-                <a:latin typeface="Helvetica"/>
-                <a:cs typeface="Helvetica"/>
-              </a:rPr>
-              <a:t>Consumer group B, with 4 consumers, reads from the same topic</a:t>
-            </a:r>
-            <a:endParaRPr lang="en-US" sz="1800" dirty="0">
-              <a:latin typeface="Helvetica"/>
-              <a:cs typeface="Helvetica"/>
-            </a:endParaRPr>
-          </a:p>
-        </p:txBody>
-      </p:sp>
-      <p:pic>
-        <p:nvPicPr>
-          <p:cNvPr id="3" name="Picture 2"/>
-          <p:cNvPicPr>
-            <a:picLocks noChangeAspect="1"/>
-          </p:cNvPicPr>
-          <p:nvPr/>
-        </p:nvPicPr>
-        <p:blipFill>
-          <a:blip r:embed="rId2"/>
-          <a:stretch>
-            <a:fillRect/>
-          </a:stretch>
-        </p:blipFill>
-        <p:spPr>
-          <a:xfrm>
-            <a:off x="3366593" y="2648401"/>
-            <a:ext cx="4948137" cy="2630655"/>
-          </a:xfrm>
-          <a:prstGeom prst="rect">
-            <a:avLst/>
-          </a:prstGeom>
-        </p:spPr>
-      </p:pic>
-    </p:spTree>
-    <p:extLst>
-      <p:ext uri="{BB962C8B-B14F-4D97-AF65-F5344CB8AC3E}">
-        <p14:creationId xmlns:p14="http://schemas.microsoft.com/office/powerpoint/2010/main" val="83466490"/>
       </p:ext>
     </p:extLst>
   </p:cSld>
